--- a/output/pptx/ICLO-근거레이어-1pager-KO.pptx
+++ b/output/pptx/ICLO-근거레이어-1pager-KO.pptx
@@ -3268,7 +3268,7 @@
         <p:spPr>
           <a:xfrm>
             <a:off x="384048" y="1060704"/>
-            <a:ext cx="8686800" cy="4932336"/>
+            <a:ext cx="8686800" cy="5079569"/>
           </a:xfrm>
           <a:prstGeom prst="rect">
             <a:avLst/>
@@ -3384,7 +3384,7 @@
                 </a:solidFill>
                 <a:latin typeface="Apple SD Gothic Neo"/>
               </a:rPr>
-              <a:t>가운데 축 ④→⑦</a:t>
+              <a:t>가운데 축 ①→⑦</a:t>
             </a:r>
           </a:p>
         </p:txBody>
@@ -3398,7 +3398,7 @@
         <p:spPr>
           <a:xfrm>
             <a:off x="9418320" y="1577340"/>
-            <a:ext cx="2404872" cy="405993"/>
+            <a:ext cx="2404872" cy="270662"/>
           </a:xfrm>
           <a:prstGeom prst="rect">
             <a:avLst/>
@@ -3426,7 +3426,7 @@
                 </a:solidFill>
                 <a:latin typeface="Apple SD Gothic Neo"/>
               </a:rPr>
-              <a:t>정본에서 기업 화면까지. 위에서 아래로 흐릅니다. 원천에서 정본까지는 기술문서 그림 1-A.</a:t>
+              <a:t>원천에서 기업 화면까지의 본류. 위에서 아래로 흐릅니다.</a:t>
             </a:r>
           </a:p>
         </p:txBody>
@@ -3439,7 +3439,7 @@
         </p:nvCxnSpPr>
         <p:spPr>
           <a:xfrm>
-            <a:off x="9418320" y="2025395"/>
+            <a:off x="9418320" y="1892808"/>
             <a:ext cx="2404872" cy="0"/>
           </a:xfrm>
           <a:prstGeom prst="line">
@@ -3475,7 +3475,7 @@
         </p:nvSpPr>
         <p:spPr>
           <a:xfrm>
-            <a:off x="9418320" y="2093976"/>
+            <a:off x="9418320" y="1961388"/>
             <a:ext cx="2404872" cy="173736"/>
           </a:xfrm>
           <a:prstGeom prst="rect">
@@ -3497,11 +3497,11 @@
             <a:r>
               <a:rPr sz="980" b="1">
                 <a:solidFill>
-                  <a:srgbClr val="17202B"/>
-                </a:solidFill>
-                <a:latin typeface="Apple SD Gothic Neo"/>
-              </a:rPr>
-              <a:t>검은 띠 두 개</a:t>
+                  <a:srgbClr val="C9880A"/>
+                </a:solidFill>
+                <a:latin typeface="Apple SD Gothic Neo"/>
+              </a:rPr>
+              <a:t>왼쪽 앰버 — 사진</a:t>
             </a:r>
           </a:p>
         </p:txBody>
@@ -3514,8 +3514,8 @@
         </p:nvSpPr>
         <p:spPr>
           <a:xfrm>
-            <a:off x="9418320" y="2263140"/>
-            <a:ext cx="2404872" cy="541324"/>
+            <a:off x="9418320" y="2130552"/>
+            <a:ext cx="2404872" cy="405993"/>
           </a:xfrm>
           <a:prstGeom prst="rect">
             <a:avLst/>
@@ -3543,7 +3543,7 @@
                 </a:solidFill>
                 <a:latin typeface="Apple SD Gothic Neo"/>
               </a:rPr>
-              <a:t>위는 개인 레벨(CANONICAL) — 기업 사용자는 접근 권한이 없습니다. 아래는 기업 노출용(EMPLOYER) — 뷰만 존재합니다.</a:t>
+              <a:t>사진은 이 축을 타지 않습니다. 바이너리는 ICLO 저장소에만 있고 파생 신호만 돌아옵니다.</a:t>
             </a:r>
           </a:p>
         </p:txBody>
@@ -3556,7 +3556,7 @@
         </p:nvCxnSpPr>
         <p:spPr>
           <a:xfrm>
-            <a:off x="9418320" y="2843784"/>
+            <a:off x="9418320" y="2578608"/>
             <a:ext cx="2404872" cy="0"/>
           </a:xfrm>
           <a:prstGeom prst="line">
@@ -3592,7 +3592,7 @@
         </p:nvSpPr>
         <p:spPr>
           <a:xfrm>
-            <a:off x="9418320" y="2912364"/>
+            <a:off x="9418320" y="2647188"/>
             <a:ext cx="2404872" cy="173736"/>
           </a:xfrm>
           <a:prstGeom prst="rect">
@@ -3614,11 +3614,11 @@
             <a:r>
               <a:rPr sz="980" b="1">
                 <a:solidFill>
-                  <a:srgbClr val="B3261E"/>
-                </a:solidFill>
-                <a:latin typeface="Apple SD Gothic Neo"/>
-              </a:rPr>
-              <a:t>빨간 칩 — ENTITY KEY</a:t>
+                  <a:srgbClr val="0B7A55"/>
+                </a:solidFill>
+                <a:latin typeface="Apple SD Gothic Neo"/>
+              </a:rPr>
+              <a:t>왼쪽 초록 — 실시간 조회</a:t>
             </a:r>
           </a:p>
         </p:txBody>
@@ -3631,8 +3631,8 @@
         </p:nvSpPr>
         <p:spPr>
           <a:xfrm>
-            <a:off x="9418320" y="3081528"/>
-            <a:ext cx="2404872" cy="270662"/>
+            <a:off x="9418320" y="2816352"/>
+            <a:ext cx="2404872" cy="405993"/>
           </a:xfrm>
           <a:prstGeom prst="rect">
             <a:avLst/>
@@ -3660,7 +3660,7 @@
                 </a:solidFill>
                 <a:latin typeface="Apple SD Gothic Neo"/>
               </a:rPr>
-              <a:t>단일 최대 결함 지점. 없으면 n≥20이 '20명'이 아니라 '20행'을 셉니다.</a:t>
+              <a:t>잔여 한도는 창고를 안 거칩니다. 청구 지연 때문에 창고 값을 개인 한도로 쓸 수 없습니다.</a:t>
             </a:r>
           </a:p>
         </p:txBody>
@@ -3673,7 +3673,7 @@
         </p:nvCxnSpPr>
         <p:spPr>
           <a:xfrm>
-            <a:off x="9418320" y="3396996"/>
+            <a:off x="9418320" y="3264408"/>
             <a:ext cx="2404872" cy="0"/>
           </a:xfrm>
           <a:prstGeom prst="line">
@@ -3709,7 +3709,7 @@
         </p:nvSpPr>
         <p:spPr>
           <a:xfrm>
-            <a:off x="9418320" y="3465576"/>
+            <a:off x="9418320" y="3332988"/>
             <a:ext cx="2404872" cy="173736"/>
           </a:xfrm>
           <a:prstGeom prst="rect">
@@ -3735,7 +3735,7 @@
                 </a:solidFill>
                 <a:latin typeface="Apple SD Gothic Neo"/>
               </a:rPr>
-              <a:t>⑤ MART</a:t>
+              <a:t>파란 점선 — Snowflake</a:t>
             </a:r>
           </a:p>
         </p:txBody>
@@ -3748,7 +3748,7 @@
         </p:nvSpPr>
         <p:spPr>
           <a:xfrm>
-            <a:off x="9418320" y="3634740"/>
+            <a:off x="9418320" y="3502152"/>
             <a:ext cx="2404872" cy="405993"/>
           </a:xfrm>
           <a:prstGeom prst="rect">
@@ -3777,7 +3777,7 @@
                 </a:solidFill>
                 <a:latin typeface="Apple SD Gothic Neo"/>
               </a:rPr>
-              <a:t>레이어 사이의 파생 지표. 완결성은 곡선이 없는 최근 달을 100%로 채우지 않습니다.</a:t>
+              <a:t>그 안쪽이 Snowflake 위에서 도는 부분. 구현은 ICLO가 하고 요청은 검토입니다.</a:t>
             </a:r>
           </a:p>
         </p:txBody>
@@ -3790,7 +3790,7 @@
         </p:nvCxnSpPr>
         <p:spPr>
           <a:xfrm>
-            <a:off x="9418320" y="4082796"/>
+            <a:off x="9418320" y="3950208"/>
             <a:ext cx="2404872" cy="0"/>
           </a:xfrm>
           <a:prstGeom prst="line">
@@ -3826,7 +3826,7 @@
         </p:nvSpPr>
         <p:spPr>
           <a:xfrm>
-            <a:off x="9418320" y="4151376"/>
+            <a:off x="9418320" y="4018788"/>
             <a:ext cx="2404872" cy="173736"/>
           </a:xfrm>
           <a:prstGeom prst="rect">
@@ -3848,11 +3848,11 @@
             <a:r>
               <a:rPr sz="980" b="1">
                 <a:solidFill>
-                  <a:srgbClr val="0B7A55"/>
-                </a:solidFill>
-                <a:latin typeface="Apple SD Gothic Neo"/>
-              </a:rPr>
-              <a:t>⑦ 노출 세 갈래</a:t>
+                  <a:srgbClr val="17202B"/>
+                </a:solidFill>
+                <a:latin typeface="Apple SD Gothic Neo"/>
+              </a:rPr>
+              <a:t>검은 띠 두 개</a:t>
             </a:r>
           </a:p>
         </p:txBody>
@@ -3865,8 +3865,8 @@
         </p:nvSpPr>
         <p:spPr>
           <a:xfrm>
-            <a:off x="9418320" y="4320540"/>
-            <a:ext cx="2404872" cy="270662"/>
+            <a:off x="9418320" y="4187952"/>
+            <a:ext cx="2404872" cy="405993"/>
           </a:xfrm>
           <a:prstGeom prst="rect">
             <a:avLst/>
@@ -3894,7 +3894,7 @@
                 </a:solidFill>
                 <a:latin typeface="Apple SD Gothic Neo"/>
               </a:rPr>
-              <a:t>같은 데이터를 기업·임직원·임상이 각각 다른 범위로 봅니다.</a:t>
+              <a:t>위는 개인 레벨(CANONICAL), 아래는 기업 노출용(EMPLOYER). 기업 사용자는 위를 못 봅니다.</a:t>
             </a:r>
           </a:p>
         </p:txBody>
@@ -3965,11 +3965,11 @@
             <a:r>
               <a:rPr sz="980" b="1">
                 <a:solidFill>
-                  <a:srgbClr val="5A6B7D"/>
-                </a:solidFill>
-                <a:latin typeface="Apple SD Gothic Neo"/>
-              </a:rPr>
-              <a:t>맨 아래 문단</a:t>
+                  <a:srgbClr val="B3261E"/>
+                </a:solidFill>
+                <a:latin typeface="Apple SD Gothic Neo"/>
+              </a:rPr>
+              <a:t>빨간 칩 — ENTITY KEY</a:t>
             </a:r>
           </a:p>
         </p:txBody>
@@ -3983,7 +3983,7 @@
         <p:spPr>
           <a:xfrm>
             <a:off x="9418320" y="4873752"/>
-            <a:ext cx="2404872" cy="405993"/>
+            <a:ext cx="2404872" cy="270662"/>
           </a:xfrm>
           <a:prstGeom prst="rect">
             <a:avLst/>
@@ -4011,7 +4011,124 @@
                 </a:solidFill>
                 <a:latin typeface="Apple SD Gothic Neo"/>
               </a:rPr>
-              <a:t>이 설계에서 가장 위험한 곳. 신원을 잘못 묶으면 그 오류가 집계 화면에서 보이지 않습니다.</a:t>
+              <a:t>단일 최대 결함 지점. 없으면 n≥20이 '20명'이 아니라 '20행'을 셉니다.</a:t>
+            </a:r>
+          </a:p>
+        </p:txBody>
+      </p:sp>
+      <p:cxnSp>
+        <p:nvCxnSpPr>
+          <p:cNvPr id="26" name="Connector 25"/>
+          <p:cNvCxnSpPr/>
+          <p:nvPr/>
+        </p:nvCxnSpPr>
+        <p:spPr>
+          <a:xfrm>
+            <a:off x="9418320" y="5189220"/>
+            <a:ext cx="2404872" cy="0"/>
+          </a:xfrm>
+          <a:prstGeom prst="line">
+            <a:avLst/>
+          </a:prstGeom>
+          <a:ln w="10160">
+            <a:solidFill>
+              <a:srgbClr val="DDE3EA"/>
+            </a:solidFill>
+            <a:prstDash val="sysDot"/>
+          </a:ln>
+        </p:spPr>
+        <p:style>
+          <a:lnRef idx="2">
+            <a:schemeClr val="accent1"/>
+          </a:lnRef>
+          <a:fillRef idx="0">
+            <a:schemeClr val="accent1"/>
+          </a:fillRef>
+          <a:effectRef idx="1">
+            <a:schemeClr val="accent1"/>
+          </a:effectRef>
+          <a:fontRef idx="minor">
+            <a:schemeClr val="tx1"/>
+          </a:fontRef>
+        </p:style>
+      </p:cxnSp>
+      <p:sp>
+        <p:nvSpPr>
+          <p:cNvPr id="27" name="TextBox 26"/>
+          <p:cNvSpPr txBox="1"/>
+          <p:nvPr/>
+        </p:nvSpPr>
+        <p:spPr>
+          <a:xfrm>
+            <a:off x="9418320" y="5257800"/>
+            <a:ext cx="2404872" cy="173736"/>
+          </a:xfrm>
+          <a:prstGeom prst="rect">
+            <a:avLst/>
+          </a:prstGeom>
+          <a:noFill/>
+        </p:spPr>
+        <p:txBody>
+          <a:bodyPr wrap="square" lIns="0" rIns="0" tIns="0" bIns="0" anchor="t">
+            <a:spAutoFit/>
+          </a:bodyPr>
+          <a:lstStyle/>
+          <a:p>
+            <a:pPr>
+              <a:spcAft>
+                <a:spcPts val="0"/>
+              </a:spcAft>
+            </a:pPr>
+            <a:r>
+              <a:rPr sz="980" b="1">
+                <a:solidFill>
+                  <a:srgbClr val="5A6B7D"/>
+                </a:solidFill>
+                <a:latin typeface="Apple SD Gothic Neo"/>
+              </a:rPr>
+              <a:t>오른쪽 두 상자</a:t>
+            </a:r>
+          </a:p>
+        </p:txBody>
+      </p:sp>
+      <p:sp>
+        <p:nvSpPr>
+          <p:cNvPr id="28" name="TextBox 27"/>
+          <p:cNvSpPr txBox="1"/>
+          <p:nvPr/>
+        </p:nvSpPr>
+        <p:spPr>
+          <a:xfrm>
+            <a:off x="9418320" y="5426964"/>
+            <a:ext cx="2404872" cy="270662"/>
+          </a:xfrm>
+          <a:prstGeom prst="rect">
+            <a:avLst/>
+          </a:prstGeom>
+          <a:noFill/>
+        </p:spPr>
+        <p:txBody>
+          <a:bodyPr wrap="square" lIns="0" rIns="0" tIns="0" bIns="0" anchor="t">
+            <a:spAutoFit/>
+          </a:bodyPr>
+          <a:lstStyle/>
+          <a:p>
+            <a:pPr>
+              <a:lnSpc>
+                <a:spcPct val="112000"/>
+              </a:lnSpc>
+              <a:spcAft>
+                <a:spcPts val="0"/>
+              </a:spcAft>
+            </a:pPr>
+            <a:r>
+              <a:rPr sz="830" b="0">
+                <a:solidFill>
+                  <a:srgbClr val="5A6B7D"/>
+                </a:solidFill>
+                <a:latin typeface="Apple SD Gothic Neo"/>
+              </a:rPr>
+              <a:t>회의에서 답을 받아야 하는 것과, 아직 만들지 않은 것.</a:t>
             </a:r>
           </a:p>
         </p:txBody>

--- a/output/pptx/ICLO-근거레이어-1pager-KO.pptx
+++ b/output/pptx/ICLO-근거레이어-1pager-KO.pptx
@@ -3163,7 +3163,7 @@
                 </a:solidFill>
                 <a:latin typeface="Apple SD Gothic Neo"/>
               </a:rPr>
-              <a:t>미국 self-funded employer 치아보험 · 원천에서 화면까지 · 기술문서 2절 그림 1</a:t>
+              <a:t>미국 self-funded employer 치아보험 · 원천에서 기업 화면까지 · 세부는 기술문서 2절 그림 1-A · 1-B · 1-C</a:t>
             </a:r>
           </a:p>
         </p:txBody>
@@ -3268,7 +3268,7 @@
         <p:spPr>
           <a:xfrm>
             <a:off x="384048" y="1060704"/>
-            <a:ext cx="8686800" cy="5079569"/>
+            <a:ext cx="8686800" cy="4726208"/>
           </a:xfrm>
           <a:prstGeom prst="rect">
             <a:avLst/>

--- a/output/pptx/ICLO-근거레이어-1pager-KO.pptx
+++ b/output/pptx/ICLO-근거레이어-1pager-KO.pptx
@@ -9341,7 +9341,7 @@
         </p:nvSpPr>
         <p:spPr>
           <a:xfrm>
-            <a:off x="384048" y="5138928"/>
+            <a:off x="384048" y="5175504"/>
             <a:ext cx="11420856" cy="164592"/>
           </a:xfrm>
           <a:prstGeom prst="rect">
